--- a/files/results_slide_template.pptx
+++ b/files/results_slide_template.pptx
@@ -208,7 +208,7 @@
           <a:p>
             <a:fld id="{F1FB89E9-A828-4633-A683-FD5E2772D2C2}" type="datetimeFigureOut">
               <a:rPr lang="en-US" smtClean="0"/>
-              <a:t>4/16/25</a:t>
+              <a:t>3/21/26</a:t>
             </a:fld>
             <a:endParaRPr lang="en-US"/>
           </a:p>
@@ -1544,6 +1544,290 @@
 
 <file path=ppt/slideLayouts/slideLayout3.xml><?xml version="1.0" encoding="utf-8"?>
 <p:sldLayout xmlns:a="http://schemas.openxmlformats.org/drawingml/2006/main" xmlns:r="http://schemas.openxmlformats.org/officeDocument/2006/relationships" xmlns:p="http://schemas.openxmlformats.org/presentationml/2006/main" preserve="1" userDrawn="1">
+  <p:cSld name="two_column_layout">
+    <p:spTree>
+      <p:nvGrpSpPr>
+        <p:cNvPr id="1" name=""/>
+        <p:cNvGrpSpPr/>
+        <p:nvPr/>
+      </p:nvGrpSpPr>
+      <p:grpSpPr>
+        <a:xfrm>
+          <a:off x="0" y="0"/>
+          <a:ext cx="0" cy="0"/>
+          <a:chOff x="0" y="0"/>
+          <a:chExt cx="0" cy="0"/>
+        </a:xfrm>
+      </p:grpSpPr>
+      <p:sp>
+        <p:nvSpPr>
+          <p:cNvPr id="2" name="Title 1">
+            <a:extLst>
+              <a:ext uri="{FF2B5EF4-FFF2-40B4-BE49-F238E27FC236}">
+                <a16:creationId xmlns:a16="http://schemas.microsoft.com/office/drawing/2014/main" id="{90EE2F22-3206-34D1-54F2-8CE634CAC8AE}"/>
+              </a:ext>
+            </a:extLst>
+          </p:cNvPr>
+          <p:cNvSpPr>
+            <a:spLocks noGrp="1"/>
+          </p:cNvSpPr>
+          <p:nvPr>
+            <p:ph type="title"/>
+          </p:nvPr>
+        </p:nvSpPr>
+        <p:spPr/>
+        <p:txBody>
+          <a:bodyPr/>
+          <a:lstStyle/>
+          <a:p>
+            <a:r>
+              <a:rPr lang="en-US"/>
+              <a:t>Click to edit Master title style</a:t>
+            </a:r>
+          </a:p>
+        </p:txBody>
+      </p:sp>
+      <p:sp>
+        <p:nvSpPr>
+          <p:cNvPr id="3" name="Date Placeholder 2">
+            <a:extLst>
+              <a:ext uri="{FF2B5EF4-FFF2-40B4-BE49-F238E27FC236}">
+                <a16:creationId xmlns:a16="http://schemas.microsoft.com/office/drawing/2014/main" id="{BCC70210-84BE-7DD6-8F66-4AA498C471C8}"/>
+              </a:ext>
+            </a:extLst>
+          </p:cNvPr>
+          <p:cNvSpPr>
+            <a:spLocks noGrp="1"/>
+          </p:cNvSpPr>
+          <p:nvPr>
+            <p:ph type="dt" sz="half" idx="10"/>
+          </p:nvPr>
+        </p:nvSpPr>
+        <p:spPr/>
+        <p:txBody>
+          <a:bodyPr/>
+          <a:lstStyle/>
+          <a:p>
+            <a:pPr>
+              <a:defRPr/>
+            </a:pPr>
+            <a:r>
+              <a:rPr lang="en-US"/>
+              <a:t>As of: </a:t>
+            </a:r>
+          </a:p>
+        </p:txBody>
+      </p:sp>
+      <p:sp>
+        <p:nvSpPr>
+          <p:cNvPr id="4" name="Slide Number Placeholder 3">
+            <a:extLst>
+              <a:ext uri="{FF2B5EF4-FFF2-40B4-BE49-F238E27FC236}">
+                <a16:creationId xmlns:a16="http://schemas.microsoft.com/office/drawing/2014/main" id="{02C6A3B4-1395-B269-4300-97F1FDEB2373}"/>
+              </a:ext>
+            </a:extLst>
+          </p:cNvPr>
+          <p:cNvSpPr>
+            <a:spLocks noGrp="1"/>
+          </p:cNvSpPr>
+          <p:nvPr>
+            <p:ph type="sldNum" sz="quarter" idx="11"/>
+          </p:nvPr>
+        </p:nvSpPr>
+        <p:spPr/>
+        <p:txBody>
+          <a:bodyPr/>
+          <a:lstStyle/>
+          <a:p>
+            <a:pPr>
+              <a:defRPr/>
+            </a:pPr>
+            <a:fld id="{F4524FF1-59DA-4E30-B21E-DD2136E2174F}" type="slidenum">
+              <a:rPr lang="en-US" smtClean="0"/>
+              <a:pPr>
+                <a:defRPr/>
+              </a:pPr>
+              <a:t>‹#›</a:t>
+            </a:fld>
+            <a:endParaRPr lang="en-US"/>
+          </a:p>
+        </p:txBody>
+      </p:sp>
+      <p:sp>
+        <p:nvSpPr>
+          <p:cNvPr id="5" name="Content Placeholder 2">
+            <a:extLst>
+              <a:ext uri="{FF2B5EF4-FFF2-40B4-BE49-F238E27FC236}">
+                <a16:creationId xmlns:a16="http://schemas.microsoft.com/office/drawing/2014/main" id="{95B30F2D-CD9C-8455-A98A-8DC4FDC126CC}"/>
+              </a:ext>
+            </a:extLst>
+          </p:cNvPr>
+          <p:cNvSpPr>
+            <a:spLocks noGrp="1"/>
+          </p:cNvSpPr>
+          <p:nvPr>
+            <p:ph idx="1"/>
+          </p:nvPr>
+        </p:nvSpPr>
+        <p:spPr>
+          <a:xfrm>
+            <a:off x="457200" y="1504951"/>
+            <a:ext cx="5355771" cy="3622220"/>
+          </a:xfrm>
+        </p:spPr>
+        <p:txBody>
+          <a:bodyPr/>
+          <a:lstStyle/>
+          <a:p>
+            <a:pPr lvl="0"/>
+            <a:r>
+              <a:rPr lang="en-US"/>
+              <a:t>Click to edit Master text styles</a:t>
+            </a:r>
+          </a:p>
+          <a:p>
+            <a:pPr lvl="1"/>
+            <a:r>
+              <a:rPr lang="en-US"/>
+              <a:t>Second level</a:t>
+            </a:r>
+          </a:p>
+          <a:p>
+            <a:pPr lvl="2"/>
+            <a:r>
+              <a:rPr lang="en-US"/>
+              <a:t>Third level</a:t>
+            </a:r>
+          </a:p>
+          <a:p>
+            <a:pPr lvl="3"/>
+            <a:r>
+              <a:rPr lang="en-US"/>
+              <a:t>Fourth level</a:t>
+            </a:r>
+          </a:p>
+          <a:p>
+            <a:pPr lvl="4"/>
+            <a:r>
+              <a:rPr lang="en-US"/>
+              <a:t>Fifth level</a:t>
+            </a:r>
+          </a:p>
+        </p:txBody>
+      </p:sp>
+      <p:sp>
+        <p:nvSpPr>
+          <p:cNvPr id="6" name="Content Placeholder 2">
+            <a:extLst>
+              <a:ext uri="{FF2B5EF4-FFF2-40B4-BE49-F238E27FC236}">
+                <a16:creationId xmlns:a16="http://schemas.microsoft.com/office/drawing/2014/main" id="{6C3BCDED-4BD9-42B1-4891-7FB8756CED93}"/>
+              </a:ext>
+            </a:extLst>
+          </p:cNvPr>
+          <p:cNvSpPr>
+            <a:spLocks noGrp="1"/>
+          </p:cNvSpPr>
+          <p:nvPr>
+            <p:ph idx="12"/>
+          </p:nvPr>
+        </p:nvSpPr>
+        <p:spPr>
+          <a:xfrm>
+            <a:off x="6379029" y="1504950"/>
+            <a:ext cx="5355771" cy="3622221"/>
+          </a:xfrm>
+        </p:spPr>
+        <p:txBody>
+          <a:bodyPr/>
+          <a:lstStyle/>
+          <a:p>
+            <a:pPr lvl="0"/>
+            <a:r>
+              <a:rPr lang="en-US"/>
+              <a:t>Click to edit Master text styles</a:t>
+            </a:r>
+          </a:p>
+          <a:p>
+            <a:pPr lvl="1"/>
+            <a:r>
+              <a:rPr lang="en-US"/>
+              <a:t>Second level</a:t>
+            </a:r>
+          </a:p>
+          <a:p>
+            <a:pPr lvl="2"/>
+            <a:r>
+              <a:rPr lang="en-US"/>
+              <a:t>Third level</a:t>
+            </a:r>
+          </a:p>
+          <a:p>
+            <a:pPr lvl="3"/>
+            <a:r>
+              <a:rPr lang="en-US"/>
+              <a:t>Fourth level</a:t>
+            </a:r>
+          </a:p>
+          <a:p>
+            <a:pPr lvl="4"/>
+            <a:r>
+              <a:rPr lang="en-US"/>
+              <a:t>Fifth level</a:t>
+            </a:r>
+          </a:p>
+        </p:txBody>
+      </p:sp>
+      <p:sp>
+        <p:nvSpPr>
+          <p:cNvPr id="12" name="Text Placeholder 11">
+            <a:extLst>
+              <a:ext uri="{FF2B5EF4-FFF2-40B4-BE49-F238E27FC236}">
+                <a16:creationId xmlns:a16="http://schemas.microsoft.com/office/drawing/2014/main" id="{14F82D6D-690C-EBED-6D1C-02A8DA6FA836}"/>
+              </a:ext>
+            </a:extLst>
+          </p:cNvPr>
+          <p:cNvSpPr>
+            <a:spLocks noGrp="1"/>
+          </p:cNvSpPr>
+          <p:nvPr>
+            <p:ph type="body" sz="quarter" idx="13"/>
+          </p:nvPr>
+        </p:nvSpPr>
+        <p:spPr>
+          <a:xfrm>
+            <a:off x="457200" y="5225143"/>
+            <a:ext cx="11277600" cy="1143000"/>
+          </a:xfrm>
+        </p:spPr>
+        <p:txBody>
+          <a:bodyPr/>
+          <a:lstStyle>
+            <a:lvl1pPr>
+              <a:buNone/>
+              <a:defRPr/>
+            </a:lvl1pPr>
+          </a:lstStyle>
+          <a:p>
+            <a:pPr lvl="0"/>
+            <a:endParaRPr lang="en-US" dirty="0"/>
+          </a:p>
+        </p:txBody>
+      </p:sp>
+    </p:spTree>
+    <p:extLst>
+      <p:ext uri="{BB962C8B-B14F-4D97-AF65-F5344CB8AC3E}">
+        <p14:creationId xmlns:p14="http://schemas.microsoft.com/office/powerpoint/2010/main" val="879356346"/>
+      </p:ext>
+    </p:extLst>
+  </p:cSld>
+  <p:clrMapOvr>
+    <a:masterClrMapping/>
+  </p:clrMapOvr>
+</p:sldLayout>
+</file>
+
+<file path=ppt/slideLayouts/slideLayout4.xml><?xml version="1.0" encoding="utf-8"?>
+<p:sldLayout xmlns:a="http://schemas.openxmlformats.org/drawingml/2006/main" xmlns:r="http://schemas.openxmlformats.org/officeDocument/2006/relationships" xmlns:p="http://schemas.openxmlformats.org/presentationml/2006/main" preserve="1" userDrawn="1">
   <p:cSld name="Picture Placeholder">
     <p:spTree>
       <p:nvGrpSpPr>
@@ -1696,7 +1980,7 @@
 </p:sldLayout>
 </file>
 
-<file path=ppt/slideLayouts/slideLayout4.xml><?xml version="1.0" encoding="utf-8"?>
+<file path=ppt/slideLayouts/slideLayout5.xml><?xml version="1.0" encoding="utf-8"?>
 <p:sldLayout xmlns:a="http://schemas.openxmlformats.org/drawingml/2006/main" xmlns:r="http://schemas.openxmlformats.org/officeDocument/2006/relationships" xmlns:p="http://schemas.openxmlformats.org/presentationml/2006/main" showMasterSp="0" userDrawn="1">
   <p:cSld name="Black Picture">
     <p:bg>
@@ -1761,7 +2045,7 @@
 </p:sldLayout>
 </file>
 
-<file path=ppt/slideLayouts/slideLayout5.xml><?xml version="1.0" encoding="utf-8"?>
+<file path=ppt/slideLayouts/slideLayout6.xml><?xml version="1.0" encoding="utf-8"?>
 <p:sldLayout xmlns:a="http://schemas.openxmlformats.org/drawingml/2006/main" xmlns:r="http://schemas.openxmlformats.org/officeDocument/2006/relationships" xmlns:p="http://schemas.openxmlformats.org/presentationml/2006/main" showMasterSp="0" preserve="1" userDrawn="1">
   <p:cSld name="Custom Layout">
     <p:spTree>
@@ -2750,7 +3034,7 @@
           <p:nvPr userDrawn="1"/>
         </p:nvPicPr>
         <p:blipFill>
-          <a:blip r:embed="rId7" cstate="print">
+          <a:blip r:embed="rId8" cstate="print">
             <a:extLst>
               <a:ext uri="{28A0092B-C50C-407E-A947-70E740481C1C}">
                 <a14:useLocalDpi xmlns:a14="http://schemas.microsoft.com/office/drawing/2010/main"/>
@@ -3040,9 +3324,10 @@
   <p:sldLayoutIdLst>
     <p:sldLayoutId id="2147483666" r:id="rId1"/>
     <p:sldLayoutId id="2147483667" r:id="rId2"/>
-    <p:sldLayoutId id="2147483671" r:id="rId3"/>
-    <p:sldLayoutId id="2147483670" r:id="rId4"/>
-    <p:sldLayoutId id="2147483668" r:id="rId5"/>
+    <p:sldLayoutId id="2147483672" r:id="rId3"/>
+    <p:sldLayoutId id="2147483671" r:id="rId4"/>
+    <p:sldLayoutId id="2147483670" r:id="rId5"/>
+    <p:sldLayoutId id="2147483668" r:id="rId6"/>
   </p:sldLayoutIdLst>
   <p:hf hdr="0" ftr="0" dt="0"/>
   <p:txStyles>
@@ -5098,12 +5383,9 @@
 </file>
 
 <file path=customXml/item1.xml><?xml version="1.0" encoding="utf-8"?>
-<?mso-contentType ?>
-<FormTemplates xmlns="http://schemas.microsoft.com/sharepoint/v3/contenttype/forms">
-  <Display>DocumentLibraryForm</Display>
-  <Edit>DocumentLibraryForm</Edit>
-  <New>DocumentLibraryForm</New>
-</FormTemplates>
+<p:properties xmlns:p="http://schemas.microsoft.com/office/2006/metadata/properties" xmlns:xsi="http://www.w3.org/2001/XMLSchema-instance" xmlns:pc="http://schemas.microsoft.com/office/infopath/2007/PartnerControls">
+  <documentManagement/>
+</p:properties>
 </file>
 
 <file path=customXml/item2.xml><?xml version="1.0" encoding="utf-8"?>
@@ -5284,15 +5566,27 @@
 </file>
 
 <file path=customXml/item3.xml><?xml version="1.0" encoding="utf-8"?>
-<p:properties xmlns:p="http://schemas.microsoft.com/office/2006/metadata/properties" xmlns:xsi="http://www.w3.org/2001/XMLSchema-instance" xmlns:pc="http://schemas.microsoft.com/office/infopath/2007/PartnerControls">
-  <documentManagement/>
-</p:properties>
+<?mso-contentType ?>
+<FormTemplates xmlns="http://schemas.microsoft.com/sharepoint/v3/contenttype/forms">
+  <Display>DocumentLibraryForm</Display>
+  <Edit>DocumentLibraryForm</Edit>
+  <New>DocumentLibraryForm</New>
+</FormTemplates>
 </file>
 
 <file path=customXml/itemProps1.xml><?xml version="1.0" encoding="utf-8"?>
-<ds:datastoreItem xmlns:ds="http://schemas.openxmlformats.org/officeDocument/2006/customXml" ds:itemID="{F0210A9E-FB7A-4395-8F34-1716D0AD47AF}">
+<ds:datastoreItem xmlns:ds="http://schemas.openxmlformats.org/officeDocument/2006/customXml" ds:itemID="{F4FCE405-1005-4980-8098-E51D3FB2D57F}">
   <ds:schemaRefs>
-    <ds:schemaRef ds:uri="http://schemas.microsoft.com/sharepoint/v3/contenttype/forms"/>
+    <ds:schemaRef ds:uri="0e9d41ae-4249-446b-8316-88e9fdc24f25"/>
+    <ds:schemaRef ds:uri="531bccbd-292c-49ab-9a0b-b4c770216460"/>
+    <ds:schemaRef ds:uri="http://purl.org/dc/dcmitype/"/>
+    <ds:schemaRef ds:uri="http://purl.org/dc/elements/1.1/"/>
+    <ds:schemaRef ds:uri="http://purl.org/dc/terms/"/>
+    <ds:schemaRef ds:uri="http://schemas.microsoft.com/office/2006/documentManagement/types"/>
+    <ds:schemaRef ds:uri="http://schemas.microsoft.com/office/2006/metadata/properties"/>
+    <ds:schemaRef ds:uri="http://schemas.microsoft.com/office/infopath/2007/PartnerControls"/>
+    <ds:schemaRef ds:uri="http://schemas.openxmlformats.org/package/2006/metadata/core-properties"/>
+    <ds:schemaRef ds:uri="http://www.w3.org/XML/1998/namespace"/>
   </ds:schemaRefs>
 </ds:datastoreItem>
 </file>
@@ -5317,18 +5611,9 @@
 </file>
 
 <file path=customXml/itemProps3.xml><?xml version="1.0" encoding="utf-8"?>
-<ds:datastoreItem xmlns:ds="http://schemas.openxmlformats.org/officeDocument/2006/customXml" ds:itemID="{F4FCE405-1005-4980-8098-E51D3FB2D57F}">
+<ds:datastoreItem xmlns:ds="http://schemas.openxmlformats.org/officeDocument/2006/customXml" ds:itemID="{F0210A9E-FB7A-4395-8F34-1716D0AD47AF}">
   <ds:schemaRefs>
-    <ds:schemaRef ds:uri="0e9d41ae-4249-446b-8316-88e9fdc24f25"/>
-    <ds:schemaRef ds:uri="531bccbd-292c-49ab-9a0b-b4c770216460"/>
-    <ds:schemaRef ds:uri="http://purl.org/dc/dcmitype/"/>
-    <ds:schemaRef ds:uri="http://purl.org/dc/elements/1.1/"/>
-    <ds:schemaRef ds:uri="http://purl.org/dc/terms/"/>
-    <ds:schemaRef ds:uri="http://schemas.microsoft.com/office/2006/documentManagement/types"/>
-    <ds:schemaRef ds:uri="http://schemas.microsoft.com/office/2006/metadata/properties"/>
-    <ds:schemaRef ds:uri="http://schemas.microsoft.com/office/infopath/2007/PartnerControls"/>
-    <ds:schemaRef ds:uri="http://schemas.openxmlformats.org/package/2006/metadata/core-properties"/>
-    <ds:schemaRef ds:uri="http://www.w3.org/XML/1998/namespace"/>
+    <ds:schemaRef ds:uri="http://schemas.microsoft.com/sharepoint/v3/contenttype/forms"/>
   </ds:schemaRefs>
 </ds:datastoreItem>
 </file>
